--- a/assets/readme/examples/business-report.pptx
+++ b/assets/readme/examples/business-report.pptx
@@ -3090,7 +3090,7 @@
         <p:spPr>
           <a:xfrm>
             <a:off x="508000" y="336573"/>
-            <a:ext cx="1446733" cy="93980"/>
+            <a:ext cx="1452321" cy="93980"/>
           </a:xfrm>
           <a:prstGeom prst="rect">
             <a:avLst/>
@@ -3135,8 +3135,8 @@
         </p:nvSpPr>
         <p:spPr>
           <a:xfrm>
-            <a:off x="6504173" y="336573"/>
-            <a:ext cx="549097" cy="93980"/>
+            <a:off x="6492997" y="336573"/>
+            <a:ext cx="560273" cy="93980"/>
           </a:xfrm>
           <a:prstGeom prst="rect">
             <a:avLst/>
@@ -3204,7 +3204,7 @@
         <p:spPr>
           <a:xfrm>
             <a:off x="508000" y="726507"/>
-            <a:ext cx="2321103" cy="274320"/>
+            <a:ext cx="2490876" cy="274320"/>
           </a:xfrm>
           <a:prstGeom prst="rect">
             <a:avLst/>
@@ -3250,7 +3250,7 @@
         <p:spPr>
           <a:xfrm>
             <a:off x="508000" y="1051627"/>
-            <a:ext cx="2955696" cy="274320"/>
+            <a:ext cx="3193440" cy="274320"/>
           </a:xfrm>
           <a:prstGeom prst="rect">
             <a:avLst/>
@@ -3597,7 +3597,7 @@
         <p:spPr>
           <a:xfrm>
             <a:off x="685800" y="2923607"/>
-            <a:ext cx="559968" cy="274320"/>
+            <a:ext cx="610870" cy="274320"/>
           </a:xfrm>
           <a:prstGeom prst="rect">
             <a:avLst/>
@@ -3643,7 +3643,7 @@
         <p:spPr>
           <a:xfrm>
             <a:off x="685800" y="3264165"/>
-            <a:ext cx="906507" cy="111601"/>
+            <a:ext cx="959955" cy="111601"/>
           </a:xfrm>
           <a:prstGeom prst="rect">
             <a:avLst/>
@@ -3894,7 +3894,7 @@
         <p:spPr>
           <a:xfrm>
             <a:off x="2926400" y="2923607"/>
-            <a:ext cx="630377" cy="274320"/>
+            <a:ext cx="649275" cy="274320"/>
           </a:xfrm>
           <a:prstGeom prst="rect">
             <a:avLst/>
@@ -3940,7 +3940,7 @@
         <p:spPr>
           <a:xfrm>
             <a:off x="2926400" y="3264165"/>
-            <a:ext cx="946563" cy="111601"/>
+            <a:ext cx="1027036" cy="111601"/>
           </a:xfrm>
           <a:prstGeom prst="rect">
             <a:avLst/>
@@ -4191,7 +4191,7 @@
         <p:spPr>
           <a:xfrm>
             <a:off x="5167000" y="2923607"/>
-            <a:ext cx="788568" cy="274320"/>
+            <a:ext cx="839470" cy="274320"/>
           </a:xfrm>
           <a:prstGeom prst="rect">
             <a:avLst/>
@@ -4237,7 +4237,7 @@
         <p:spPr>
           <a:xfrm>
             <a:off x="5167000" y="3264165"/>
-            <a:ext cx="899751" cy="111601"/>
+            <a:ext cx="959955" cy="111601"/>
           </a:xfrm>
           <a:prstGeom prst="rect">
             <a:avLst/>
@@ -4418,7 +4418,7 @@
         <p:spPr>
           <a:xfrm>
             <a:off x="711200" y="4186558"/>
-            <a:ext cx="1288745" cy="140970"/>
+            <a:ext cx="1423924" cy="140970"/>
           </a:xfrm>
           <a:prstGeom prst="rect">
             <a:avLst/>
@@ -4783,7 +4783,7 @@
         <p:spPr>
           <a:xfrm>
             <a:off x="3440560" y="4161158"/>
-            <a:ext cx="1517193" cy="140970"/>
+            <a:ext cx="1627530" cy="140970"/>
           </a:xfrm>
           <a:prstGeom prst="rect">
             <a:avLst/>
@@ -4829,7 +4829,7 @@
         <p:spPr>
           <a:xfrm>
             <a:off x="3440560" y="4385463"/>
-            <a:ext cx="852576" cy="105727"/>
+            <a:ext cx="903211" cy="105727"/>
           </a:xfrm>
           <a:prstGeom prst="rect">
             <a:avLst/>
@@ -5788,7 +5788,7 @@
         <p:spPr>
           <a:xfrm>
             <a:off x="660400" y="6554155"/>
-            <a:ext cx="797255" cy="140970"/>
+            <a:ext cx="865226" cy="140970"/>
           </a:xfrm>
           <a:prstGeom prst="rect">
             <a:avLst/>
@@ -6734,7 +6734,7 @@
         <p:spPr>
           <a:xfrm>
             <a:off x="762000" y="7029539"/>
-            <a:ext cx="312395" cy="105727"/>
+            <a:ext cx="337884" cy="105727"/>
           </a:xfrm>
           <a:prstGeom prst="rect">
             <a:avLst/>
@@ -7334,7 +7334,7 @@
         <p:spPr>
           <a:xfrm>
             <a:off x="5537200" y="7029539"/>
-            <a:ext cx="649351" cy="105727"/>
+            <a:ext cx="674497" cy="105727"/>
           </a:xfrm>
           <a:prstGeom prst="rect">
             <a:avLst/>
